--- a/ASSIGNMENT_3_SLIDES.pptx
+++ b/ASSIGNMENT_3_SLIDES.pptx
@@ -5001,7 +5001,7 @@
         </p:nvSpPr>
         <p:spPr>
           <a:xfrm>
-            <a:off x="0" y="0"/>
+            <a:off x="21771" y="0"/>
             <a:ext cx="18288000" cy="10287000"/>
           </a:xfrm>
           <a:custGeom>
@@ -5048,7 +5048,7 @@
           <p:nvPr>
             <p:extLst>
               <p:ext uri="{D42A27DB-BD31-4B8C-83A1-F6EECF244321}">
-                <p14:modId xmlns:p14="http://schemas.microsoft.com/office/powerpoint/2010/main" val="239849685"/>
+                <p14:modId xmlns:p14="http://schemas.microsoft.com/office/powerpoint/2010/main" val="2113175412"/>
               </p:ext>
             </p:extLst>
           </p:nvPr>
@@ -5076,14 +5076,14 @@
                     </a:ext>
                   </a:extLst>
                 </a:gridCol>
-                <a:gridCol w="2332062">
+                <a:gridCol w="2397028">
                   <a:extLst>
                     <a:ext uri="{9D8B030D-6E8A-4147-A177-3AD203B41FA5}">
                       <a16:colId xmlns:a16="http://schemas.microsoft.com/office/drawing/2014/main" val="20002"/>
                     </a:ext>
                   </a:extLst>
                 </a:gridCol>
-                <a:gridCol w="2573129">
+                <a:gridCol w="2508163">
                   <a:extLst>
                     <a:ext uri="{9D8B030D-6E8A-4147-A177-3AD203B41FA5}">
                       <a16:colId xmlns:a16="http://schemas.microsoft.com/office/drawing/2014/main" val="20003"/>
@@ -6051,10 +6051,10 @@
         </p:nvGrpSpPr>
         <p:grpSpPr>
           <a:xfrm>
-            <a:off x="864369" y="1547626"/>
-            <a:ext cx="17423631" cy="3076949"/>
-            <a:chOff x="0" y="0"/>
-            <a:chExt cx="23231508" cy="4102598"/>
+            <a:off x="864369" y="1519940"/>
+            <a:ext cx="16585431" cy="2630193"/>
+            <a:chOff x="0" y="-47626"/>
+            <a:chExt cx="23231508" cy="4524491"/>
           </a:xfrm>
         </p:grpSpPr>
         <p:sp>
@@ -6065,8 +6065,8 @@
           </p:nvSpPr>
           <p:spPr>
             <a:xfrm>
-              <a:off x="0" y="-47625"/>
-              <a:ext cx="23231508" cy="1155487"/>
+              <a:off x="0" y="-47626"/>
+              <a:ext cx="23231508" cy="1529754"/>
             </a:xfrm>
             <a:prstGeom prst="rect">
               <a:avLst/>
@@ -6087,7 +6087,7 @@
                 </a:spcBef>
               </a:pPr>
               <a:r>
-                <a:rPr lang="en-US" sz="2537" b="1">
+                <a:rPr lang="en-US" sz="2537" b="1" dirty="0">
                   <a:solidFill>
                     <a:srgbClr val="4E3557"/>
                   </a:solidFill>
@@ -6096,10 +6096,10 @@
                   <a:cs typeface="Glacial Indifference Bold"/>
                   <a:sym typeface="Glacial Indifference Bold"/>
                 </a:rPr>
-                <a:t>Material and Positional Evaluation:</a:t>
+                <a:t>Material and Positional Evaluation (Eval(node)):</a:t>
               </a:r>
               <a:r>
-                <a:rPr lang="en-US" sz="2537">
+                <a:rPr lang="en-US" sz="2537" dirty="0">
                   <a:solidFill>
                     <a:srgbClr val="4E3557"/>
                   </a:solidFill>
@@ -6122,7 +6122,7 @@
           <p:spPr>
             <a:xfrm>
               <a:off x="0" y="1449743"/>
-              <a:ext cx="20883945" cy="1155487"/>
+              <a:ext cx="20883946" cy="1529754"/>
             </a:xfrm>
             <a:prstGeom prst="rect">
               <a:avLst/>
@@ -6143,7 +6143,7 @@
                 </a:spcBef>
               </a:pPr>
               <a:r>
-                <a:rPr lang="en-US" sz="2537" b="1">
+                <a:rPr lang="en-US" sz="2537" b="1" dirty="0">
                   <a:solidFill>
                     <a:srgbClr val="4E3557"/>
                   </a:solidFill>
@@ -6152,10 +6152,10 @@
                   <a:cs typeface="Glacial Indifference Bold"/>
                   <a:sym typeface="Glacial Indifference Bold"/>
                 </a:rPr>
-                <a:t>Strategic Bonuses:</a:t>
+                <a:t>Strategic Bonuses (S(node)):</a:t>
               </a:r>
               <a:r>
-                <a:rPr lang="en-US" sz="2537">
+                <a:rPr lang="en-US" sz="2537" dirty="0">
                   <a:solidFill>
                     <a:srgbClr val="4E3557"/>
                   </a:solidFill>
@@ -6178,7 +6178,7 @@
           <p:spPr>
             <a:xfrm>
               <a:off x="0" y="2947111"/>
-              <a:ext cx="22524984" cy="1155487"/>
+              <a:ext cx="22524985" cy="1529754"/>
             </a:xfrm>
             <a:prstGeom prst="rect">
               <a:avLst/>
@@ -6199,7 +6199,7 @@
                 </a:spcBef>
               </a:pPr>
               <a:r>
-                <a:rPr lang="en-US" sz="2537" b="1">
+                <a:rPr lang="en-US" sz="2537" b="1" dirty="0">
                   <a:solidFill>
                     <a:srgbClr val="4E3557"/>
                   </a:solidFill>
@@ -6208,10 +6208,10 @@
                   <a:cs typeface="Glacial Indifference Bold"/>
                   <a:sym typeface="Glacial Indifference Bold"/>
                 </a:rPr>
-                <a:t>Game Outcome:</a:t>
+                <a:t>Game Outcome (O(node)):</a:t>
               </a:r>
               <a:r>
-                <a:rPr lang="en-US" sz="2537">
+                <a:rPr lang="en-US" sz="2537" dirty="0">
                   <a:solidFill>
                     <a:srgbClr val="4E3557"/>
                   </a:solidFill>
@@ -6234,8 +6234,8 @@
         </p:nvSpPr>
         <p:spPr>
           <a:xfrm>
-            <a:off x="-1447800" y="4726356"/>
-            <a:ext cx="6708233" cy="829201"/>
+            <a:off x="-1143000" y="4844927"/>
+            <a:ext cx="6251033" cy="829201"/>
           </a:xfrm>
           <a:prstGeom prst="rect">
             <a:avLst/>
@@ -6967,6 +6967,41 @@
                 <a:sym typeface="Canva Sans"/>
               </a:rPr>
               <a:t>1/2-1/2 (Draw)</a:t>
+            </a:r>
+          </a:p>
+        </p:txBody>
+      </p:sp>
+      <p:sp>
+        <p:nvSpPr>
+          <p:cNvPr id="28" name="TextBox 27">
+            <a:extLst>
+              <a:ext uri="{FF2B5EF4-FFF2-40B4-BE49-F238E27FC236}">
+                <a16:creationId xmlns:a16="http://schemas.microsoft.com/office/drawing/2014/main" id="{0B118886-5B0A-E14C-E054-8B7346D29D13}"/>
+              </a:ext>
+            </a:extLst>
+          </p:cNvPr>
+          <p:cNvSpPr txBox="1"/>
+          <p:nvPr/>
+        </p:nvSpPr>
+        <p:spPr>
+          <a:xfrm>
+            <a:off x="6777723" y="4395382"/>
+            <a:ext cx="5414277" cy="461665"/>
+          </a:xfrm>
+          <a:prstGeom prst="rect">
+            <a:avLst/>
+          </a:prstGeom>
+          <a:noFill/>
+        </p:spPr>
+        <p:txBody>
+          <a:bodyPr wrap="square" rtlCol="0">
+            <a:spAutoFit/>
+          </a:bodyPr>
+          <a:lstStyle/>
+          <a:p>
+            <a:r>
+              <a:rPr lang="en-IN" sz="2400" b="1" dirty="0"/>
+              <a:t>Eval(node)  = M(node)+S(node)+O(node)</a:t>
             </a:r>
           </a:p>
         </p:txBody>
